--- a/курсач/11 01 кр презентлддация.pptx
+++ b/курсач/11 01 кр презентлддация.pptx
@@ -224,7 +224,7 @@
           <a:p>
             <a:fld id="{BF6A742F-06BB-4F49-82EA-40B155807A83}" type="datetimeFigureOut">
               <a:rPr lang="ru-RU" smtClean="0"/>
-              <a:t>12.04.2026</a:t>
+              <a:t>19.04.2026</a:t>
             </a:fld>
             <a:endParaRPr lang="ru-RU"/>
           </a:p>
@@ -738,7 +738,7 @@
           <a:p>
             <a:fld id="{E139295C-1C7B-4648-87F0-42E1ABBAE4B3}" type="datetimeFigureOut">
               <a:rPr lang="ru-RU" smtClean="0"/>
-              <a:t>12.04.2026</a:t>
+              <a:t>19.04.2026</a:t>
             </a:fld>
             <a:endParaRPr lang="ru-RU"/>
           </a:p>
@@ -920,7 +920,7 @@
           <a:p>
             <a:fld id="{E139295C-1C7B-4648-87F0-42E1ABBAE4B3}" type="datetimeFigureOut">
               <a:rPr lang="ru-RU" smtClean="0"/>
-              <a:t>12.04.2026</a:t>
+              <a:t>19.04.2026</a:t>
             </a:fld>
             <a:endParaRPr lang="ru-RU"/>
           </a:p>
@@ -1112,7 +1112,7 @@
           <a:p>
             <a:fld id="{E139295C-1C7B-4648-87F0-42E1ABBAE4B3}" type="datetimeFigureOut">
               <a:rPr lang="ru-RU" smtClean="0"/>
-              <a:t>12.04.2026</a:t>
+              <a:t>19.04.2026</a:t>
             </a:fld>
             <a:endParaRPr lang="ru-RU"/>
           </a:p>
@@ -1294,7 +1294,7 @@
           <a:p>
             <a:fld id="{E139295C-1C7B-4648-87F0-42E1ABBAE4B3}" type="datetimeFigureOut">
               <a:rPr lang="ru-RU" smtClean="0"/>
-              <a:t>12.04.2026</a:t>
+              <a:t>19.04.2026</a:t>
             </a:fld>
             <a:endParaRPr lang="ru-RU"/>
           </a:p>
@@ -1574,7 +1574,7 @@
           <a:p>
             <a:fld id="{E139295C-1C7B-4648-87F0-42E1ABBAE4B3}" type="datetimeFigureOut">
               <a:rPr lang="ru-RU" smtClean="0"/>
-              <a:t>12.04.2026</a:t>
+              <a:t>19.04.2026</a:t>
             </a:fld>
             <a:endParaRPr lang="ru-RU"/>
           </a:p>
@@ -1818,7 +1818,7 @@
           <a:p>
             <a:fld id="{E139295C-1C7B-4648-87F0-42E1ABBAE4B3}" type="datetimeFigureOut">
               <a:rPr lang="ru-RU" smtClean="0"/>
-              <a:t>12.04.2026</a:t>
+              <a:t>19.04.2026</a:t>
             </a:fld>
             <a:endParaRPr lang="ru-RU"/>
           </a:p>
@@ -2185,7 +2185,7 @@
           <a:p>
             <a:fld id="{E139295C-1C7B-4648-87F0-42E1ABBAE4B3}" type="datetimeFigureOut">
               <a:rPr lang="ru-RU" smtClean="0"/>
-              <a:t>12.04.2026</a:t>
+              <a:t>19.04.2026</a:t>
             </a:fld>
             <a:endParaRPr lang="ru-RU"/>
           </a:p>
@@ -2338,7 +2338,7 @@
           <a:p>
             <a:fld id="{E139295C-1C7B-4648-87F0-42E1ABBAE4B3}" type="datetimeFigureOut">
               <a:rPr lang="ru-RU" smtClean="0"/>
-              <a:t>12.04.2026</a:t>
+              <a:t>19.04.2026</a:t>
             </a:fld>
             <a:endParaRPr lang="ru-RU"/>
           </a:p>
@@ -2445,7 +2445,7 @@
           <a:p>
             <a:fld id="{E139295C-1C7B-4648-87F0-42E1ABBAE4B3}" type="datetimeFigureOut">
               <a:rPr lang="ru-RU" smtClean="0"/>
-              <a:t>12.04.2026</a:t>
+              <a:t>19.04.2026</a:t>
             </a:fld>
             <a:endParaRPr lang="ru-RU"/>
           </a:p>
@@ -2814,7 +2814,7 @@
           <a:p>
             <a:fld id="{E139295C-1C7B-4648-87F0-42E1ABBAE4B3}" type="datetimeFigureOut">
               <a:rPr lang="ru-RU" smtClean="0"/>
-              <a:t>12.04.2026</a:t>
+              <a:t>19.04.2026</a:t>
             </a:fld>
             <a:endParaRPr lang="ru-RU"/>
           </a:p>
@@ -3182,7 +3182,7 @@
           <a:p>
             <a:fld id="{E139295C-1C7B-4648-87F0-42E1ABBAE4B3}" type="datetimeFigureOut">
               <a:rPr lang="ru-RU" smtClean="0"/>
-              <a:t>12.04.2026</a:t>
+              <a:t>19.04.2026</a:t>
             </a:fld>
             <a:endParaRPr lang="ru-RU"/>
           </a:p>
@@ -3434,7 +3434,7 @@
           <a:p>
             <a:fld id="{E139295C-1C7B-4648-87F0-42E1ABBAE4B3}" type="datetimeFigureOut">
               <a:rPr lang="ru-RU" smtClean="0"/>
-              <a:t>12.04.2026</a:t>
+              <a:t>19.04.2026</a:t>
             </a:fld>
             <a:endParaRPr lang="ru-RU"/>
           </a:p>
@@ -7487,7 +7487,7 @@
           <p:nvPr>
             <p:extLst>
               <p:ext uri="{D42A27DB-BD31-4B8C-83A1-F6EECF244321}">
-                <p14:modId xmlns:p14="http://schemas.microsoft.com/office/powerpoint/2010/main" val="4003321788"/>
+                <p14:modId xmlns:p14="http://schemas.microsoft.com/office/powerpoint/2010/main" val="336318910"/>
               </p:ext>
             </p:extLst>
           </p:nvPr>
@@ -9389,7 +9389,7 @@
         <p:spPr>
           <a:xfrm>
             <a:off x="581890" y="1698171"/>
-            <a:ext cx="11085615" cy="3139321"/>
+            <a:ext cx="11085615" cy="3600986"/>
           </a:xfrm>
           <a:prstGeom prst="rect">
             <a:avLst/>
@@ -9421,8 +9421,23 @@
                 <a:ea typeface="+mj-ea"/>
                 <a:cs typeface="Arial" panose="020B0604020202020204" pitchFamily="34" charset="0"/>
               </a:rPr>
-              <a:t>Рост популярности онлайн-сервисов аренды жилья</a:t>
-            </a:r>
+              <a:t>Рынок аренды жилья активно развивается, поэтому пользователям необходим удобный цифровой сервис для поиска и бронирования объектов</a:t>
+            </a:r>
+            <a:r>
+              <a:rPr lang="ru-RU" sz="2000" dirty="0"/>
+              <a:t>.</a:t>
+            </a:r>
+            <a:endParaRPr lang="ru-RU" sz="2000" cap="all" dirty="0">
+              <a:solidFill>
+                <a:schemeClr val="tx1">
+                  <a:lumMod val="85000"/>
+                  <a:lumOff val="15000"/>
+                </a:schemeClr>
+              </a:solidFill>
+              <a:latin typeface="Arial" panose="020B0604020202020204" pitchFamily="34" charset="0"/>
+              <a:ea typeface="+mj-ea"/>
+              <a:cs typeface="Arial" panose="020B0604020202020204" pitchFamily="34" charset="0"/>
+            </a:endParaRPr>
           </a:p>
           <a:p>
             <a:pPr marL="342900" indent="-342900" algn="ctr">
@@ -9444,7 +9459,7 @@
                 <a:ea typeface="+mj-ea"/>
                 <a:cs typeface="Arial" panose="020B0604020202020204" pitchFamily="34" charset="0"/>
               </a:rPr>
-              <a:t>Необходимость хранения информации об объектах и клиентах</a:t>
+              <a:t>Автоматизация обработки объявлений и заявок упрощает взаимодействие между пользователем и арендодателем.</a:t>
             </a:r>
           </a:p>
           <a:p>
@@ -9467,76 +9482,7 @@
                 <a:ea typeface="+mj-ea"/>
                 <a:cs typeface="Arial" panose="020B0604020202020204" pitchFamily="34" charset="0"/>
               </a:rPr>
-              <a:t>Автоматизация процессов бронирования</a:t>
-            </a:r>
-          </a:p>
-          <a:p>
-            <a:pPr marL="342900" indent="-342900" algn="ctr">
-              <a:lnSpc>
-                <a:spcPct val="150000"/>
-              </a:lnSpc>
-              <a:buFont typeface="Arial" panose="020B0604020202020204" pitchFamily="34" charset="0"/>
-              <a:buChar char="•"/>
-            </a:pPr>
-            <a:r>
-              <a:rPr lang="ru-RU" sz="2000" cap="all" dirty="0">
-                <a:solidFill>
-                  <a:schemeClr val="tx1">
-                    <a:lumMod val="85000"/>
-                    <a:lumOff val="15000"/>
-                  </a:schemeClr>
-                </a:solidFill>
-                <a:latin typeface="Arial" panose="020B0604020202020204" pitchFamily="34" charset="0"/>
-                <a:ea typeface="+mj-ea"/>
-                <a:cs typeface="Arial" panose="020B0604020202020204" pitchFamily="34" charset="0"/>
-              </a:rPr>
-              <a:t>Упрощение управления объявлениями</a:t>
-            </a:r>
-          </a:p>
-          <a:p>
-            <a:pPr marL="342900" indent="-342900" algn="ctr">
-              <a:lnSpc>
-                <a:spcPct val="150000"/>
-              </a:lnSpc>
-              <a:buFont typeface="Arial" panose="020B0604020202020204" pitchFamily="34" charset="0"/>
-              <a:buChar char="•"/>
-            </a:pPr>
-            <a:r>
-              <a:rPr lang="ru-RU" sz="2000" cap="all" dirty="0">
-                <a:solidFill>
-                  <a:schemeClr val="tx1">
-                    <a:lumMod val="85000"/>
-                    <a:lumOff val="15000"/>
-                  </a:schemeClr>
-                </a:solidFill>
-                <a:latin typeface="Arial" panose="020B0604020202020204" pitchFamily="34" charset="0"/>
-                <a:ea typeface="+mj-ea"/>
-                <a:cs typeface="Arial" panose="020B0604020202020204" pitchFamily="34" charset="0"/>
-              </a:rPr>
-              <a:t>Повышение удобства для пользователей</a:t>
-            </a:r>
-          </a:p>
-          <a:p>
-            <a:pPr marL="342900" indent="-342900" algn="ctr">
-              <a:lnSpc>
-                <a:spcPct val="150000"/>
-              </a:lnSpc>
-              <a:buFont typeface="Arial" panose="020B0604020202020204" pitchFamily="34" charset="0"/>
-              <a:buChar char="•"/>
-            </a:pPr>
-            <a:r>
-              <a:rPr lang="ru-RU" sz="2000" cap="all" dirty="0">
-                <a:solidFill>
-                  <a:schemeClr val="tx1">
-                    <a:lumMod val="85000"/>
-                    <a:lumOff val="15000"/>
-                  </a:schemeClr>
-                </a:solidFill>
-                <a:latin typeface="Arial" panose="020B0604020202020204" pitchFamily="34" charset="0"/>
-                <a:ea typeface="+mj-ea"/>
-                <a:cs typeface="Arial" panose="020B0604020202020204" pitchFamily="34" charset="0"/>
-              </a:rPr>
-              <a:t>Развитие онлайн сервисов  </a:t>
+              <a:t>Разработка данной системы имеет практическую значимость и может служить основой для реального веб-сервиса аренды жилья. </a:t>
             </a:r>
           </a:p>
           <a:p>
@@ -11521,10 +11467,10 @@
       </p:sp>
       <p:sp>
         <p:nvSpPr>
-          <p:cNvPr id="13" name="TextBox 12">
+          <p:cNvPr id="3" name="TextBox 2">
             <a:extLst>
               <a:ext uri="{FF2B5EF4-FFF2-40B4-BE49-F238E27FC236}">
-                <a16:creationId xmlns:a16="http://schemas.microsoft.com/office/drawing/2014/main" id="{579A92F4-99DC-41B2-895E-440D57843E97}"/>
+                <a16:creationId xmlns:a16="http://schemas.microsoft.com/office/drawing/2014/main" id="{088CE572-11BB-41D4-A50F-171E895332A4}"/>
               </a:ext>
             </a:extLst>
           </p:cNvPr>
@@ -11533,22 +11479,13 @@
         </p:nvSpPr>
         <p:spPr>
           <a:xfrm>
-            <a:off x="3059826" y="4591480"/>
-            <a:ext cx="5708172" cy="1323439"/>
+            <a:off x="1299889" y="4232615"/>
+            <a:ext cx="8966787" cy="1938992"/>
           </a:xfrm>
           <a:prstGeom prst="rect">
             <a:avLst/>
           </a:prstGeom>
-          <a:solidFill>
-            <a:schemeClr val="bg1">
-              <a:lumMod val="95000"/>
-            </a:schemeClr>
-          </a:solidFill>
-          <a:ln>
-            <a:solidFill>
-              <a:schemeClr val="tx1"/>
-            </a:solidFill>
-          </a:ln>
+          <a:noFill/>
         </p:spPr>
         <p:txBody>
           <a:bodyPr wrap="square" rtlCol="0">
@@ -11557,113 +11494,11 @@
           <a:lstStyle/>
           <a:p>
             <a:r>
-              <a:rPr lang="ru-RU" sz="2000" b="1" cap="all" dirty="0">
-                <a:solidFill>
-                  <a:schemeClr val="tx1">
-                    <a:lumMod val="85000"/>
-                    <a:lumOff val="15000"/>
-                  </a:schemeClr>
-                </a:solidFill>
+              <a:rPr lang="ru-RU" sz="2000" dirty="0">
                 <a:latin typeface="Arial" panose="020B0604020202020204" pitchFamily="34" charset="0"/>
-                <a:ea typeface="+mj-ea"/>
                 <a:cs typeface="Arial" panose="020B0604020202020204" pitchFamily="34" charset="0"/>
               </a:rPr>
-              <a:t>Выбор: </a:t>
-            </a:r>
-            <a:r>
-              <a:rPr lang="ru-RU" sz="2000" b="1" cap="all" dirty="0" err="1">
-                <a:solidFill>
-                  <a:schemeClr val="tx1">
-                    <a:lumMod val="85000"/>
-                    <a:lumOff val="15000"/>
-                  </a:schemeClr>
-                </a:solidFill>
-                <a:latin typeface="Arial" panose="020B0604020202020204" pitchFamily="34" charset="0"/>
-                <a:ea typeface="+mj-ea"/>
-                <a:cs typeface="Arial" panose="020B0604020202020204" pitchFamily="34" charset="0"/>
-              </a:rPr>
-              <a:t>SQLite</a:t>
-            </a:r>
-            <a:br>
-              <a:rPr lang="ru-RU" sz="2000" cap="all" dirty="0">
-                <a:solidFill>
-                  <a:schemeClr val="tx1">
-                    <a:lumMod val="85000"/>
-                    <a:lumOff val="15000"/>
-                  </a:schemeClr>
-                </a:solidFill>
-                <a:latin typeface="Arial" panose="020B0604020202020204" pitchFamily="34" charset="0"/>
-                <a:ea typeface="+mj-ea"/>
-                <a:cs typeface="Arial" panose="020B0604020202020204" pitchFamily="34" charset="0"/>
-              </a:rPr>
-            </a:br>
-            <a:r>
-              <a:rPr lang="ru-RU" sz="2000" cap="all" dirty="0">
-                <a:solidFill>
-                  <a:schemeClr val="tx1">
-                    <a:lumMod val="85000"/>
-                    <a:lumOff val="15000"/>
-                  </a:schemeClr>
-                </a:solidFill>
-                <a:latin typeface="Arial" panose="020B0604020202020204" pitchFamily="34" charset="0"/>
-                <a:ea typeface="+mj-ea"/>
-                <a:cs typeface="Arial" panose="020B0604020202020204" pitchFamily="34" charset="0"/>
-              </a:rPr>
-              <a:t>✔ простота </a:t>
-            </a:r>
-            <a:br>
-              <a:rPr lang="ru-RU" sz="2000" cap="all" dirty="0">
-                <a:solidFill>
-                  <a:schemeClr val="tx1">
-                    <a:lumMod val="85000"/>
-                    <a:lumOff val="15000"/>
-                  </a:schemeClr>
-                </a:solidFill>
-                <a:latin typeface="Arial" panose="020B0604020202020204" pitchFamily="34" charset="0"/>
-                <a:ea typeface="+mj-ea"/>
-                <a:cs typeface="Arial" panose="020B0604020202020204" pitchFamily="34" charset="0"/>
-              </a:rPr>
-            </a:br>
-            <a:r>
-              <a:rPr lang="ru-RU" sz="2000" cap="all" dirty="0">
-                <a:solidFill>
-                  <a:schemeClr val="tx1">
-                    <a:lumMod val="85000"/>
-                    <a:lumOff val="15000"/>
-                  </a:schemeClr>
-                </a:solidFill>
-                <a:latin typeface="Arial" panose="020B0604020202020204" pitchFamily="34" charset="0"/>
-                <a:ea typeface="+mj-ea"/>
-                <a:cs typeface="Arial" panose="020B0604020202020204" pitchFamily="34" charset="0"/>
-              </a:rPr>
-              <a:t>✔ не требует сервера </a:t>
-            </a:r>
-            <a:br>
-              <a:rPr lang="ru-RU" sz="2000" cap="all" dirty="0">
-                <a:solidFill>
-                  <a:schemeClr val="tx1">
-                    <a:lumMod val="85000"/>
-                    <a:lumOff val="15000"/>
-                  </a:schemeClr>
-                </a:solidFill>
-                <a:latin typeface="Arial" panose="020B0604020202020204" pitchFamily="34" charset="0"/>
-                <a:ea typeface="+mj-ea"/>
-                <a:cs typeface="Arial" panose="020B0604020202020204" pitchFamily="34" charset="0"/>
-              </a:rPr>
-            </a:br>
-            <a:r>
-              <a:rPr lang="ru-RU" sz="2000" cap="all" dirty="0">
-                <a:solidFill>
-                  <a:schemeClr val="tx1">
-                    <a:lumMod val="85000"/>
-                    <a:lumOff val="15000"/>
-                  </a:schemeClr>
-                </a:solidFill>
-                <a:latin typeface="Arial" panose="020B0604020202020204" pitchFamily="34" charset="0"/>
-                <a:ea typeface="+mj-ea"/>
-                <a:cs typeface="Arial" panose="020B0604020202020204" pitchFamily="34" charset="0"/>
-              </a:rPr>
-              <a:t>✔ подходит для учебного проекта</a:t>
+              <a:t>Проведённый анализ показал, что существующие сервисы обладают широким функционалом, однако часто перегружены интерфейсом, содержат неактуальные объявления или ориентированы на массовый рынок. Разрабатываемое приложение отличается упрощённой структурой, понятным интерфейсом и реализацией только ключевых функций аренды жилья, что более наглядно, удобно.</a:t>
             </a:r>
           </a:p>
         </p:txBody>
@@ -11759,19 +11594,8 @@
                 <a:latin typeface="Arial" panose="020B0604020202020204" pitchFamily="34" charset="0"/>
                 <a:cs typeface="Arial" panose="020B0604020202020204" pitchFamily="34" charset="0"/>
               </a:rPr>
-              <a:t>выбор </a:t>
-            </a:r>
-            <a:r>
-              <a:rPr lang="ru-RU" spc="0">
-                <a:latin typeface="Arial" panose="020B0604020202020204" pitchFamily="34" charset="0"/>
-                <a:cs typeface="Arial" panose="020B0604020202020204" pitchFamily="34" charset="0"/>
-              </a:rPr>
-              <a:t>технологий разработки</a:t>
-            </a:r>
-            <a:endParaRPr lang="ru-RU" spc="0" dirty="0">
-              <a:latin typeface="Arial" panose="020B0604020202020204" pitchFamily="34" charset="0"/>
-              <a:cs typeface="Arial" panose="020B0604020202020204" pitchFamily="34" charset="0"/>
-            </a:endParaRPr>
+              <a:t>выбор технологий разработки</a:t>
+            </a:r>
           </a:p>
         </p:txBody>
       </p:sp>
@@ -11889,10 +11713,10 @@
       </p:sp>
       <p:sp>
         <p:nvSpPr>
-          <p:cNvPr id="5" name="TextBox 4">
+          <p:cNvPr id="6" name="TextBox 5">
             <a:extLst>
               <a:ext uri="{FF2B5EF4-FFF2-40B4-BE49-F238E27FC236}">
-                <a16:creationId xmlns:a16="http://schemas.microsoft.com/office/drawing/2014/main" id="{287E5BEB-609E-4EB0-8A26-0D62560A165C}"/>
+                <a16:creationId xmlns:a16="http://schemas.microsoft.com/office/drawing/2014/main" id="{4678A30C-DD5D-4FB1-9B34-AB928A5DC6E6}"/>
               </a:ext>
             </a:extLst>
           </p:cNvPr>
@@ -11901,8 +11725,8 @@
         </p:nvSpPr>
         <p:spPr>
           <a:xfrm>
-            <a:off x="409686" y="1951672"/>
-            <a:ext cx="5692258" cy="1477328"/>
+            <a:off x="231569" y="1460665"/>
+            <a:ext cx="5341328" cy="2215991"/>
           </a:xfrm>
           <a:prstGeom prst="rect">
             <a:avLst/>
@@ -11916,7 +11740,7 @@
           <a:lstStyle/>
           <a:p>
             <a:r>
-              <a:rPr lang="ru-RU" sz="3000" b="1" cap="all" dirty="0">
+              <a:rPr lang="ru-RU" sz="2000" b="1" cap="all" dirty="0">
                 <a:solidFill>
                   <a:schemeClr val="tx1">
                     <a:lumMod val="85000"/>
@@ -11927,10 +11751,53 @@
                 <a:ea typeface="+mj-ea"/>
                 <a:cs typeface="Arial" panose="020B0604020202020204" pitchFamily="34" charset="0"/>
               </a:rPr>
-              <a:t>🟢Node.js</a:t>
-            </a:r>
-            <a:r>
-              <a:rPr lang="en-US" sz="3000" b="1" cap="all" dirty="0">
+              <a:t>Серверная часть</a:t>
+            </a:r>
+          </a:p>
+          <a:p>
+            <a:r>
+              <a:rPr lang="ru-RU" sz="2000" dirty="0">
+                <a:latin typeface="Arial" panose="020B0604020202020204" pitchFamily="34" charset="0"/>
+                <a:cs typeface="Arial" panose="020B0604020202020204" pitchFamily="34" charset="0"/>
+              </a:rPr>
+              <a:t>PHP выбран как основной язык серверной разработки, так как он обеспечивает удобную обработку пользовательских запросов, работу с сессиями и взаимодействие с базой данных.</a:t>
+            </a:r>
+          </a:p>
+          <a:p>
+            <a:endParaRPr lang="ru-RU" dirty="0"/>
+          </a:p>
+        </p:txBody>
+      </p:sp>
+      <p:sp>
+        <p:nvSpPr>
+          <p:cNvPr id="7" name="TextBox 6">
+            <a:extLst>
+              <a:ext uri="{FF2B5EF4-FFF2-40B4-BE49-F238E27FC236}">
+                <a16:creationId xmlns:a16="http://schemas.microsoft.com/office/drawing/2014/main" id="{2B03AA5A-72B2-43C3-B5AA-FDF92A5B05A0}"/>
+              </a:ext>
+            </a:extLst>
+          </p:cNvPr>
+          <p:cNvSpPr txBox="1"/>
+          <p:nvPr/>
+        </p:nvSpPr>
+        <p:spPr>
+          <a:xfrm>
+            <a:off x="5844746" y="1460665"/>
+            <a:ext cx="6107768" cy="2215991"/>
+          </a:xfrm>
+          <a:prstGeom prst="rect">
+            <a:avLst/>
+          </a:prstGeom>
+          <a:noFill/>
+        </p:spPr>
+        <p:txBody>
+          <a:bodyPr wrap="square" rtlCol="0">
+            <a:spAutoFit/>
+          </a:bodyPr>
+          <a:lstStyle/>
+          <a:p>
+            <a:r>
+              <a:rPr lang="ru-RU" sz="2000" b="1" cap="all" dirty="0">
                 <a:solidFill>
                   <a:schemeClr val="tx1">
                     <a:lumMod val="85000"/>
@@ -11941,10 +11808,79 @@
                 <a:ea typeface="+mj-ea"/>
                 <a:cs typeface="Arial" panose="020B0604020202020204" pitchFamily="34" charset="0"/>
               </a:rPr>
-              <a:t> – </a:t>
-            </a:r>
-            <a:r>
-              <a:rPr lang="ru-RU" sz="3000" b="1" cap="all" dirty="0">
+              <a:t>Клиентская часть</a:t>
+            </a:r>
+          </a:p>
+          <a:p>
+            <a:r>
+              <a:rPr lang="ru-RU" sz="2000" dirty="0">
+                <a:latin typeface="Arial" panose="020B0604020202020204" pitchFamily="34" charset="0"/>
+                <a:cs typeface="Arial" panose="020B0604020202020204" pitchFamily="34" charset="0"/>
+              </a:rPr>
+              <a:t>HTML - структура веб-страниц; </a:t>
+            </a:r>
+          </a:p>
+          <a:p>
+            <a:pPr>
+              <a:buFont typeface="Arial" panose="020B0604020202020204" pitchFamily="34" charset="0"/>
+              <a:buChar char="•"/>
+            </a:pPr>
+            <a:r>
+              <a:rPr lang="ru-RU" sz="2000" dirty="0">
+                <a:latin typeface="Arial" panose="020B0604020202020204" pitchFamily="34" charset="0"/>
+                <a:cs typeface="Arial" panose="020B0604020202020204" pitchFamily="34" charset="0"/>
+              </a:rPr>
+              <a:t> CSS - оформление и адаптивный дизайн интерфейса; </a:t>
+            </a:r>
+          </a:p>
+          <a:p>
+            <a:pPr>
+              <a:buFont typeface="Arial" panose="020B0604020202020204" pitchFamily="34" charset="0"/>
+              <a:buChar char="•"/>
+            </a:pPr>
+            <a:r>
+              <a:rPr lang="ru-RU" sz="2000" dirty="0">
+                <a:latin typeface="Arial" panose="020B0604020202020204" pitchFamily="34" charset="0"/>
+                <a:cs typeface="Arial" panose="020B0604020202020204" pitchFamily="34" charset="0"/>
+              </a:rPr>
+              <a:t> JavaScript - интерактивность страниц, обработка действий пользователя.</a:t>
+            </a:r>
+          </a:p>
+          <a:p>
+            <a:endParaRPr lang="ru-RU" dirty="0"/>
+          </a:p>
+        </p:txBody>
+      </p:sp>
+      <p:sp>
+        <p:nvSpPr>
+          <p:cNvPr id="9" name="TextBox 8">
+            <a:extLst>
+              <a:ext uri="{FF2B5EF4-FFF2-40B4-BE49-F238E27FC236}">
+                <a16:creationId xmlns:a16="http://schemas.microsoft.com/office/drawing/2014/main" id="{29984B9F-1730-4515-A87E-5454009F862E}"/>
+              </a:ext>
+            </a:extLst>
+          </p:cNvPr>
+          <p:cNvSpPr txBox="1"/>
+          <p:nvPr/>
+        </p:nvSpPr>
+        <p:spPr>
+          <a:xfrm>
+            <a:off x="231569" y="3669957"/>
+            <a:ext cx="5341328" cy="1938992"/>
+          </a:xfrm>
+          <a:prstGeom prst="rect">
+            <a:avLst/>
+          </a:prstGeom>
+          <a:noFill/>
+        </p:spPr>
+        <p:txBody>
+          <a:bodyPr wrap="square" rtlCol="0">
+            <a:spAutoFit/>
+          </a:bodyPr>
+          <a:lstStyle/>
+          <a:p>
+            <a:r>
+              <a:rPr lang="ru-RU" sz="2000" b="1" cap="all" dirty="0">
                 <a:solidFill>
                   <a:schemeClr val="tx1">
                     <a:lumMod val="85000"/>
@@ -11955,25 +11891,58 @@
                 <a:ea typeface="+mj-ea"/>
                 <a:cs typeface="Arial" panose="020B0604020202020204" pitchFamily="34" charset="0"/>
               </a:rPr>
-              <a:t>сервер </a:t>
-            </a:r>
-          </a:p>
-          <a:p>
-            <a:endParaRPr lang="ru-RU" sz="3000" b="1" cap="all" dirty="0">
-              <a:solidFill>
-                <a:schemeClr val="tx1">
-                  <a:lumMod val="85000"/>
-                  <a:lumOff val="15000"/>
-                </a:schemeClr>
-              </a:solidFill>
-              <a:latin typeface="Arial" panose="020B0604020202020204" pitchFamily="34" charset="0"/>
-              <a:ea typeface="+mj-ea"/>
-              <a:cs typeface="Arial" panose="020B0604020202020204" pitchFamily="34" charset="0"/>
-            </a:endParaRPr>
-          </a:p>
-          <a:p>
-            <a:r>
-              <a:rPr lang="ru-RU" sz="3000" b="1" cap="all" dirty="0">
+              <a:t>Система управления базой данных</a:t>
+            </a:r>
+          </a:p>
+          <a:p>
+            <a:r>
+              <a:rPr lang="ru-RU" sz="2000" dirty="0" err="1">
+                <a:latin typeface="Arial" panose="020B0604020202020204" pitchFamily="34" charset="0"/>
+                <a:cs typeface="Arial" panose="020B0604020202020204" pitchFamily="34" charset="0"/>
+              </a:rPr>
+              <a:t>SQLite</a:t>
+            </a:r>
+            <a:r>
+              <a:rPr lang="ru-RU" sz="2000" dirty="0">
+                <a:latin typeface="Arial" panose="020B0604020202020204" pitchFamily="34" charset="0"/>
+                <a:cs typeface="Arial" panose="020B0604020202020204" pitchFamily="34" charset="0"/>
+              </a:rPr>
+              <a:t> использована для хранения данных проекта, поскольку не требует отдельного сервера, проста в настройке и оптимально подходит для учёбы.</a:t>
+            </a:r>
+            <a:endParaRPr lang="ru-RU" dirty="0"/>
+          </a:p>
+        </p:txBody>
+      </p:sp>
+      <p:sp>
+        <p:nvSpPr>
+          <p:cNvPr id="10" name="TextBox 9">
+            <a:extLst>
+              <a:ext uri="{FF2B5EF4-FFF2-40B4-BE49-F238E27FC236}">
+                <a16:creationId xmlns:a16="http://schemas.microsoft.com/office/drawing/2014/main" id="{0928BFF1-4417-4C25-95AD-2944742EE49A}"/>
+              </a:ext>
+            </a:extLst>
+          </p:cNvPr>
+          <p:cNvSpPr txBox="1"/>
+          <p:nvPr/>
+        </p:nvSpPr>
+        <p:spPr>
+          <a:xfrm>
+            <a:off x="5572897" y="3984433"/>
+            <a:ext cx="6107768" cy="2215991"/>
+          </a:xfrm>
+          <a:prstGeom prst="rect">
+            <a:avLst/>
+          </a:prstGeom>
+          <a:noFill/>
+        </p:spPr>
+        <p:txBody>
+          <a:bodyPr wrap="square" rtlCol="0">
+            <a:spAutoFit/>
+          </a:bodyPr>
+          <a:lstStyle/>
+          <a:p>
+            <a:r>
+              <a:rPr lang="ru-RU" sz="2000" b="1" cap="all" dirty="0">
                 <a:solidFill>
                   <a:schemeClr val="tx1">
                     <a:lumMod val="85000"/>
@@ -11984,226 +11953,67 @@
                 <a:ea typeface="+mj-ea"/>
                 <a:cs typeface="Arial" panose="020B0604020202020204" pitchFamily="34" charset="0"/>
               </a:rPr>
-              <a:t>🗄️</a:t>
-            </a:r>
-            <a:r>
-              <a:rPr lang="ru-RU" sz="3000" b="1" cap="all" dirty="0" err="1">
-                <a:solidFill>
-                  <a:schemeClr val="tx1">
-                    <a:lumMod val="85000"/>
-                    <a:lumOff val="15000"/>
-                  </a:schemeClr>
-                </a:solidFill>
+              <a:t>Инструменты разработки</a:t>
+            </a:r>
+          </a:p>
+          <a:p>
+            <a:pPr>
+              <a:buFont typeface="Arial" panose="020B0604020202020204" pitchFamily="34" charset="0"/>
+              <a:buChar char="•"/>
+            </a:pPr>
+            <a:r>
+              <a:rPr lang="ru-RU" sz="2000" dirty="0">
                 <a:latin typeface="Arial" panose="020B0604020202020204" pitchFamily="34" charset="0"/>
-                <a:ea typeface="+mj-ea"/>
                 <a:cs typeface="Arial" panose="020B0604020202020204" pitchFamily="34" charset="0"/>
               </a:rPr>
-              <a:t>SQLite</a:t>
-            </a:r>
-            <a:r>
-              <a:rPr lang="en-US" sz="3000" b="1" cap="all" dirty="0">
-                <a:solidFill>
-                  <a:schemeClr val="tx1">
-                    <a:lumMod val="85000"/>
-                    <a:lumOff val="15000"/>
-                  </a:schemeClr>
-                </a:solidFill>
+              <a:t> Visual Studio Code </a:t>
+            </a:r>
+            <a:r>
+              <a:rPr lang="en-US" sz="2000" dirty="0">
                 <a:latin typeface="Arial" panose="020B0604020202020204" pitchFamily="34" charset="0"/>
-                <a:ea typeface="+mj-ea"/>
                 <a:cs typeface="Arial" panose="020B0604020202020204" pitchFamily="34" charset="0"/>
               </a:rPr>
-              <a:t> – </a:t>
-            </a:r>
-            <a:r>
-              <a:rPr lang="ru-RU" sz="3000" b="1" cap="all" dirty="0">
-                <a:solidFill>
-                  <a:schemeClr val="tx1">
-                    <a:lumMod val="85000"/>
-                    <a:lumOff val="15000"/>
-                  </a:schemeClr>
-                </a:solidFill>
+              <a:t>-</a:t>
+            </a:r>
+            <a:r>
+              <a:rPr lang="ru-RU" sz="2000" dirty="0">
                 <a:latin typeface="Arial" panose="020B0604020202020204" pitchFamily="34" charset="0"/>
-                <a:ea typeface="+mj-ea"/>
                 <a:cs typeface="Arial" panose="020B0604020202020204" pitchFamily="34" charset="0"/>
               </a:rPr>
-              <a:t>база данных</a:t>
-            </a:r>
-          </a:p>
-        </p:txBody>
-      </p:sp>
-      <p:sp>
-        <p:nvSpPr>
-          <p:cNvPr id="8" name="TextBox 7">
-            <a:extLst>
-              <a:ext uri="{FF2B5EF4-FFF2-40B4-BE49-F238E27FC236}">
-                <a16:creationId xmlns:a16="http://schemas.microsoft.com/office/drawing/2014/main" id="{76E1DE63-2637-458C-9457-08B0BD2B1D1A}"/>
-              </a:ext>
-            </a:extLst>
-          </p:cNvPr>
-          <p:cNvSpPr txBox="1"/>
-          <p:nvPr/>
-        </p:nvSpPr>
-        <p:spPr>
-          <a:xfrm>
-            <a:off x="5974353" y="1951672"/>
-            <a:ext cx="5935631" cy="1477328"/>
-          </a:xfrm>
-          <a:prstGeom prst="rect">
-            <a:avLst/>
-          </a:prstGeom>
-          <a:noFill/>
-        </p:spPr>
-        <p:txBody>
-          <a:bodyPr wrap="square" rtlCol="0">
-            <a:spAutoFit/>
-          </a:bodyPr>
-          <a:lstStyle/>
-          <a:p>
-            <a:r>
-              <a:rPr lang="ru-RU" sz="3000" b="1" cap="all" dirty="0">
-                <a:solidFill>
-                  <a:schemeClr val="tx1">
-                    <a:lumMod val="85000"/>
-                    <a:lumOff val="15000"/>
-                  </a:schemeClr>
-                </a:solidFill>
+              <a:t> написание и редактирование исходного кода; </a:t>
+            </a:r>
+          </a:p>
+          <a:p>
+            <a:pPr>
+              <a:buFont typeface="Arial" panose="020B0604020202020204" pitchFamily="34" charset="0"/>
+              <a:buChar char="•"/>
+            </a:pPr>
+            <a:r>
+              <a:rPr lang="en-US" sz="2000" dirty="0">
                 <a:latin typeface="Arial" panose="020B0604020202020204" pitchFamily="34" charset="0"/>
-                <a:ea typeface="+mj-ea"/>
                 <a:cs typeface="Arial" panose="020B0604020202020204" pitchFamily="34" charset="0"/>
               </a:rPr>
-              <a:t>🌐HTML, CSS</a:t>
-            </a:r>
-            <a:r>
-              <a:rPr lang="en-US" sz="3000" b="1" cap="all" dirty="0">
-                <a:solidFill>
-                  <a:schemeClr val="tx1">
-                    <a:lumMod val="85000"/>
-                    <a:lumOff val="15000"/>
-                  </a:schemeClr>
-                </a:solidFill>
+              <a:t> Figma – </a:t>
+            </a:r>
+            <a:r>
+              <a:rPr lang="ru-RU" sz="2000" dirty="0">
                 <a:latin typeface="Arial" panose="020B0604020202020204" pitchFamily="34" charset="0"/>
-                <a:ea typeface="+mj-ea"/>
                 <a:cs typeface="Arial" panose="020B0604020202020204" pitchFamily="34" charset="0"/>
               </a:rPr>
-              <a:t> – </a:t>
-            </a:r>
-            <a:r>
-              <a:rPr lang="ru-RU" sz="3000" b="1" cap="all" dirty="0">
-                <a:solidFill>
-                  <a:schemeClr val="tx1">
-                    <a:lumMod val="85000"/>
-                    <a:lumOff val="15000"/>
-                  </a:schemeClr>
-                </a:solidFill>
+              <a:t>проектирование сайта, разработка дизайна</a:t>
+            </a:r>
+          </a:p>
+          <a:p>
+            <a:r>
+              <a:rPr lang="ru-RU" sz="2000" dirty="0">
                 <a:latin typeface="Arial" panose="020B0604020202020204" pitchFamily="34" charset="0"/>
-                <a:ea typeface="+mj-ea"/>
                 <a:cs typeface="Arial" panose="020B0604020202020204" pitchFamily="34" charset="0"/>
               </a:rPr>
-              <a:t>интерфейс </a:t>
-            </a:r>
-          </a:p>
-          <a:p>
-            <a:endParaRPr lang="ru-RU" sz="3000" b="1" cap="all" dirty="0">
-              <a:solidFill>
-                <a:schemeClr val="tx1">
-                  <a:lumMod val="85000"/>
-                  <a:lumOff val="15000"/>
-                </a:schemeClr>
-              </a:solidFill>
-              <a:latin typeface="Arial" panose="020B0604020202020204" pitchFamily="34" charset="0"/>
-              <a:ea typeface="+mj-ea"/>
-              <a:cs typeface="Arial" panose="020B0604020202020204" pitchFamily="34" charset="0"/>
-            </a:endParaRPr>
-          </a:p>
-          <a:p>
-            <a:r>
-              <a:rPr lang="ru-RU" sz="3000" b="1" cap="all" dirty="0">
-                <a:solidFill>
-                  <a:schemeClr val="tx1">
-                    <a:lumMod val="85000"/>
-                    <a:lumOff val="15000"/>
-                  </a:schemeClr>
-                </a:solidFill>
-                <a:latin typeface="Arial" panose="020B0604020202020204" pitchFamily="34" charset="0"/>
-                <a:ea typeface="+mj-ea"/>
-                <a:cs typeface="Arial" panose="020B0604020202020204" pitchFamily="34" charset="0"/>
-              </a:rPr>
-              <a:t>⚡JavaScript</a:t>
-            </a:r>
-            <a:r>
-              <a:rPr lang="en-US" sz="3000" b="1" cap="all" dirty="0">
-                <a:solidFill>
-                  <a:schemeClr val="tx1">
-                    <a:lumMod val="85000"/>
-                    <a:lumOff val="15000"/>
-                  </a:schemeClr>
-                </a:solidFill>
-                <a:latin typeface="Arial" panose="020B0604020202020204" pitchFamily="34" charset="0"/>
-                <a:ea typeface="+mj-ea"/>
-                <a:cs typeface="Arial" panose="020B0604020202020204" pitchFamily="34" charset="0"/>
-              </a:rPr>
-              <a:t> – </a:t>
-            </a:r>
-            <a:r>
-              <a:rPr lang="ru-RU" sz="3000" b="1" cap="all" dirty="0">
-                <a:solidFill>
-                  <a:schemeClr val="tx1">
-                    <a:lumMod val="85000"/>
-                    <a:lumOff val="15000"/>
-                  </a:schemeClr>
-                </a:solidFill>
-                <a:latin typeface="Arial" panose="020B0604020202020204" pitchFamily="34" charset="0"/>
-                <a:ea typeface="+mj-ea"/>
-                <a:cs typeface="Arial" panose="020B0604020202020204" pitchFamily="34" charset="0"/>
-              </a:rPr>
-              <a:t>логика </a:t>
-            </a:r>
-          </a:p>
-        </p:txBody>
-      </p:sp>
-      <p:sp>
-        <p:nvSpPr>
-          <p:cNvPr id="11" name="TextBox 10">
-            <a:extLst>
-              <a:ext uri="{FF2B5EF4-FFF2-40B4-BE49-F238E27FC236}">
-                <a16:creationId xmlns:a16="http://schemas.microsoft.com/office/drawing/2014/main" id="{5F55099D-3AF8-4753-AD0F-2DC5E5E74889}"/>
-              </a:ext>
-            </a:extLst>
-          </p:cNvPr>
-          <p:cNvSpPr txBox="1"/>
-          <p:nvPr/>
-        </p:nvSpPr>
-        <p:spPr>
-          <a:xfrm>
-            <a:off x="409686" y="4225584"/>
-            <a:ext cx="11542828" cy="707886"/>
-          </a:xfrm>
-          <a:prstGeom prst="rect">
-            <a:avLst/>
-          </a:prstGeom>
-          <a:noFill/>
-        </p:spPr>
-        <p:txBody>
-          <a:bodyPr wrap="square" rtlCol="0">
-            <a:spAutoFit/>
-          </a:bodyPr>
-          <a:lstStyle/>
-          <a:p>
-            <a:pPr algn="ctr"/>
-            <a:r>
-              <a:rPr lang="ru-RU" sz="2000" cap="all" dirty="0">
-                <a:solidFill>
-                  <a:schemeClr val="tx1">
-                    <a:lumMod val="85000"/>
-                    <a:lumOff val="15000"/>
-                  </a:schemeClr>
-                </a:solidFill>
-                <a:latin typeface="Arial" panose="020B0604020202020204" pitchFamily="34" charset="0"/>
-                <a:ea typeface="+mj-ea"/>
-                <a:cs typeface="Arial" panose="020B0604020202020204" pitchFamily="34" charset="0"/>
-              </a:rPr>
-              <a:t>Выбор технологий обусловлен их простотой и соответствием требованиям проекта.</a:t>
-            </a:r>
+              <a:t> </a:t>
+            </a:r>
+          </a:p>
+          <a:p>
+            <a:endParaRPr lang="ru-RU" dirty="0"/>
           </a:p>
         </p:txBody>
       </p:sp>
